--- a/public/level4/downloads/slides/Level4_Lesson4_Slides.pptx
+++ b/public/level4/downloads/slides/Level4_Lesson4_Slides.pptx
@@ -1046,7 +1046,7 @@
           <a:lstStyle/>
           <a:p>
             <a:r>
-              <a:t>"Hear it, say it" (3 min). Point to the script lines. gonna = going to: "The doctor's gonna see you in a few minutes." wanna = want to: "I wanna make an appointment." You can say going to and want to.</a:t>
+              <a:t>"Hear it, say it" (3 min). Point to the script lines. gonna = going to: "The doctor's going to see you in a few minutes." wanna = want to: "I want to make an appointment." You can say going to and want to.</a:t>
             </a:r>
           </a:p>
           <a:p>
@@ -1056,7 +1056,7 @@
           </a:p>
           <a:p>
             <a:r>
-              <a:t>Reductions: learners need to understand gonna and wanna; they can always say going to and want to.</a:t>
+              <a:t>Reductions: the listening says going to and want to. People often say gonna and wanna. Learners only need to recognize the short forms.</a:t>
             </a:r>
           </a:p>
           <a:p>
@@ -1496,7 +1496,7 @@
           </a:p>
           <a:p>
             <a:r>
-              <a:t>No speaker? Read the script with a volunteer at a natural, friendly speed, two times. Say gonna and wanna where the script has them.</a:t>
+              <a:t>No speaker? Read the script with a volunteer at a natural, friendly speed, two times. The script says going to and want to. People often say gonna and wanna; learners only need to recognize those words.</a:t>
             </a:r>
           </a:p>
           <a:p>
@@ -1526,7 +1526,7 @@
           </a:p>
           <a:p>
             <a:r>
-              <a:t>Daniel: Hi, Amina. I'm Daniel. I'm gonna ask you a few questions for your health history. What brings you in today?</a:t>
+              <a:t>Daniel: Hi, Amina. I'm Daniel. I'm going to ask you a few questions for your health history. What brings you in today?</a:t>
             </a:r>
           </a:p>
           <a:p>
@@ -1596,7 +1596,7 @@
           </a:p>
           <a:p>
             <a:r>
-              <a:t>Daniel: Good. Now let me check your blood pressure. It's one eighteen over seventy-six. That's fine. The doctor's gonna see you in a few minutes.</a:t>
+              <a:t>Daniel: Good. Now let me check your blood pressure. It's one eighteen over seventy-six. That's fine. The doctor's going to see you in a few minutes.</a:t>
             </a:r>
           </a:p>
           <a:p>
@@ -1621,7 +1621,7 @@
           </a:p>
           <a:p>
             <a:r>
-              <a:t>Amina: You're right. I wanna make an appointment with the dentist.</a:t>
+              <a:t>Amina: You're right. I want to make an appointment with the dentist.</a:t>
             </a:r>
           </a:p>
           <a:p>
@@ -16674,6 +16674,17 @@
               <a:buNone/>
             </a:pPr>
             <a:r>
+              <a:rPr lang="en-US" sz="2000" dirty="0" b="1">
+                <a:solidFill>
+                  <a:srgbClr val="5B3FC4"/>
+                </a:solidFill>
+                <a:latin typeface="Lexend Deca" pitchFamily="34" charset="0"/>
+                <a:ea typeface="Lexend Deca" pitchFamily="34" charset="-122"/>
+                <a:cs typeface="Lexend Deca" pitchFamily="34" charset="-120"/>
+              </a:rPr>
+              <a:t>gonna</a:t>
+            </a:r>
+            <a:r>
               <a:rPr lang="en-US" sz="2000" dirty="0">
                 <a:solidFill>
                   <a:srgbClr val="1B2236"/>
@@ -16682,7 +16693,7 @@
                 <a:ea typeface="Lexend Deca" pitchFamily="34" charset="-122"/>
                 <a:cs typeface="Lexend Deca" pitchFamily="34" charset="-120"/>
               </a:rPr>
-              <a:t>You will hear </a:t>
+              <a:t> and </a:t>
             </a:r>
             <a:r>
               <a:rPr lang="en-US" sz="2000" dirty="0" b="1">
@@ -16693,7 +16704,7 @@
                 <a:ea typeface="Lexend Deca" pitchFamily="34" charset="-122"/>
                 <a:cs typeface="Lexend Deca" pitchFamily="34" charset="-120"/>
               </a:rPr>
-              <a:t>gonna</a:t>
+              <a:t>wanna</a:t>
             </a:r>
             <a:r>
               <a:rPr lang="en-US" sz="2000" dirty="0">
@@ -16704,29 +16715,7 @@
                 <a:ea typeface="Lexend Deca" pitchFamily="34" charset="-122"/>
                 <a:cs typeface="Lexend Deca" pitchFamily="34" charset="-120"/>
               </a:rPr>
-              <a:t> and </a:t>
-            </a:r>
-            <a:r>
-              <a:rPr lang="en-US" sz="2000" dirty="0" b="1">
-                <a:solidFill>
-                  <a:srgbClr val="5B3FC4"/>
-                </a:solidFill>
-                <a:latin typeface="Lexend Deca" pitchFamily="34" charset="0"/>
-                <a:ea typeface="Lexend Deca" pitchFamily="34" charset="-122"/>
-                <a:cs typeface="Lexend Deca" pitchFamily="34" charset="-120"/>
-              </a:rPr>
-              <a:t>wanna</a:t>
-            </a:r>
-            <a:r>
-              <a:rPr lang="en-US" sz="2000" dirty="0">
-                <a:solidFill>
-                  <a:srgbClr val="1B2236"/>
-                </a:solidFill>
-                <a:latin typeface="Lexend Deca" pitchFamily="34" charset="0"/>
-                <a:ea typeface="Lexend Deca" pitchFamily="34" charset="-122"/>
-                <a:cs typeface="Lexend Deca" pitchFamily="34" charset="-120"/>
-              </a:rPr>
-              <a:t>.</a:t>
+              <a:t> are short forms. This listening uses the full forms.</a:t>
             </a:r>
             <a:endParaRPr lang="en-US" sz="2000" dirty="0"/>
           </a:p>
@@ -16892,7 +16881,7 @@
                 <a:ea typeface="Lexend Deca" pitchFamily="34" charset="-122"/>
                 <a:cs typeface="Lexend Deca" pitchFamily="34" charset="-120"/>
               </a:rPr>
-              <a:t>gonna</a:t>
+              <a:t>going to</a:t>
             </a:r>
             <a:r>
               <a:rPr lang="en-US" sz="1800" dirty="0" b="1">
@@ -16979,7 +16968,7 @@
                 <a:ea typeface="Lexend Deca" pitchFamily="34" charset="-122"/>
                 <a:cs typeface="Lexend Deca" pitchFamily="34" charset="-120"/>
               </a:rPr>
-              <a:t>wanna</a:t>
+              <a:t>want to</a:t>
             </a:r>
             <a:r>
               <a:rPr lang="en-US" sz="1800" dirty="0" b="1">

--- a/public/level4/downloads/slides/Level4_Lesson4_Slides.pptx
+++ b/public/level4/downloads/slides/Level4_Lesson4_Slides.pptx
@@ -1596,7 +1596,7 @@
           </a:p>
           <a:p>
             <a:r>
-              <a:t>Daniel: Good. Now let me check your blood pressure. It's one eighteen over seventy-six. That's fine. The doctor's going to see you in a few minutes.</a:t>
+              <a:t>Daniel: Good. Now let me check your blood pressure. It looks normal. The doctor's going to see you in a few minutes.</a:t>
             </a:r>
           </a:p>
           <a:p>

--- a/public/level4/downloads/slides/Level4_Lesson4_Slides.pptx
+++ b/public/level4/downloads/slides/Level4_Lesson4_Slides.pptx
@@ -536,7 +536,7 @@
           </a:p>
           <a:p>
             <a:r>
-              <a:t>Audio: the listening audio for this lesson (about 2:07) is coming soon. It will use computer-generated voices (Chatterbox TTS cloned from synthetic Kokoro-82M reference clips); no recordings of real people. Until it is ready, read the listening script (in the notes of the Before You Listen slide) with a volunteer. The names and the story are invented.</a:t>
+              <a:t>Audio: synthetic voices, computer-generated (Chatterbox TTS cloned from Kokoro-82M reference clips). No recordings of real people. The names and the story are invented.</a:t>
             </a:r>
           </a:p>
           <a:p>
@@ -1491,7 +1491,7 @@
           </a:p>
           <a:p>
             <a:r>
-              <a:t>The audio (about 2:07) is coming soon. When it is ready, it plays the conversation once; press play again for play 2. Until then, read the listening script (at the end of these notes) with a volunteer.</a:t>
+              <a:t>The audio (L4_L4_listening.mp3, about 1:58) plays the conversation once. Press play again for play 2. A third play is fine if the class needs it.</a:t>
             </a:r>
           </a:p>
           <a:p>
@@ -1501,7 +1501,7 @@
           </a:p>
           <a:p>
             <a:r>
-              <a:t>Audio: the listening audio for this lesson (about 2:07) is coming soon. It will use computer-generated voices (Chatterbox TTS cloned from synthetic Kokoro-82M reference clips); no recordings of real people. Until it is ready, read the listening script (in the notes of the Before You Listen slide) with a volunteer. The names and the story are invented.</a:t>
+              <a:t>Audio: synthetic voices, computer-generated (Chatterbox TTS cloned from Kokoro-82M reference clips). No recordings of real people. The names and the story are invented.</a:t>
             </a:r>
           </a:p>
           <a:p>
@@ -1512,131 +1512,6 @@
           <a:p>
             <a:r>
               <a:t>Picture: Twemoji graphics by Twitter, Inc. and other contributors (https://github.com/jdecked/twemoji), CC BY 4.0 (https://creativecommons.org/licenses/by/4.0/); resized and combined, with signs and labels (images/CREDITS.md).</a:t>
-            </a:r>
-          </a:p>
-          <a:p>
-            <a:r>
-              <a:t>Listening script (the audio is coming soon; until then, read it aloud with a volunteer at a normal, friendly speed):</a:t>
-            </a:r>
-          </a:p>
-          <a:p>
-            <a:r>
-              <a:t>Narrator: Lesson four. Amina is at a clinic. First, she talks to Daniel, the medical assistant.</a:t>
-            </a:r>
-          </a:p>
-          <a:p>
-            <a:r>
-              <a:t>Daniel: Hi, Amina. I'm Daniel. I'm going to ask you a few questions for your health history. What brings you in today?</a:t>
-            </a:r>
-          </a:p>
-          <a:p>
-            <a:r>
-              <a:t>Amina: My lower back hurts. It isn't very bad, but it hasn't stopped.</a:t>
-            </a:r>
-          </a:p>
-          <a:p>
-            <a:r>
-              <a:t>Daniel: I'm sorry to hear that. How long have you had the back pain?</a:t>
-            </a:r>
-          </a:p>
-          <a:p>
-            <a:r>
-              <a:t>Amina: I've had it for about two weeks. It started when I moved some heavy boxes.</a:t>
-            </a:r>
-          </a:p>
-          <a:p>
-            <a:r>
-              <a:t>Daniel: OK. Have you ever had back problems before?</a:t>
-            </a:r>
-          </a:p>
-          <a:p>
-            <a:r>
-              <a:t>Amina: No, never. This is the first time.</a:t>
-            </a:r>
-          </a:p>
-          <a:p>
-            <a:r>
-              <a:t>Daniel: Have you ever had surgery?</a:t>
-            </a:r>
-          </a:p>
-          <a:p>
-            <a:r>
-              <a:t>Amina: Yes, I had knee surgery in 2018.</a:t>
-            </a:r>
-          </a:p>
-          <a:p>
-            <a:r>
-              <a:t>Daniel: Thank you. Do you have any allergies?</a:t>
-            </a:r>
-          </a:p>
-          <a:p>
-            <a:r>
-              <a:t>Amina: Yes, I'm allergic to penicillin. I get a rash.</a:t>
-            </a:r>
-          </a:p>
-          <a:p>
-            <a:r>
-              <a:t>Daniel: I'll write that down. Have you tried anything for the pain?</a:t>
-            </a:r>
-          </a:p>
-          <a:p>
-            <a:r>
-              <a:t>Amina: I've used a heating pad a few times. It helps a little.</a:t>
-            </a:r>
-          </a:p>
-          <a:p>
-            <a:r>
-              <a:t>Daniel: Have you felt dizzy?</a:t>
-            </a:r>
-          </a:p>
-          <a:p>
-            <a:r>
-              <a:t>Amina: No, I haven't.</a:t>
-            </a:r>
-          </a:p>
-          <a:p>
-            <a:r>
-              <a:t>Daniel: Good. Now let me check your blood pressure. It looks normal. The doctor's going to see you in a few minutes.</a:t>
-            </a:r>
-          </a:p>
-          <a:p>
-            <a:r>
-              <a:t>Narrator: Later, at checkout, Amina talks to Ms. Park, the receptionist.</a:t>
-            </a:r>
-          </a:p>
-          <a:p>
-            <a:r>
-              <a:t>Ms. Park: Hi, Amina. Your copay today is twenty dollars.</a:t>
-            </a:r>
-          </a:p>
-          <a:p>
-            <a:r>
-              <a:t>Amina: OK. Here's my new insurance card. I've had it since January.</a:t>
-            </a:r>
-          </a:p>
-          <a:p>
-            <a:r>
-              <a:t>Ms. Park: Thank you. Also, you haven't had a teeth cleaning for a year, and you haven't had a checkup since last spring. It's a good idea to get one every six months.</a:t>
-            </a:r>
-          </a:p>
-          <a:p>
-            <a:r>
-              <a:t>Amina: You're right. I want to make an appointment with the dentist.</a:t>
-            </a:r>
-          </a:p>
-          <a:p>
-            <a:r>
-              <a:t>Ms. Park: Why don't you call the dental office tomorrow? Here's the number. And you could get a flu shot here next week.</a:t>
-            </a:r>
-          </a:p>
-          <a:p>
-            <a:r>
-              <a:t>Amina: Good idea. Thank you!</a:t>
-            </a:r>
-          </a:p>
-          <a:p>
-            <a:r>
-              <a:t>Narrator: That's the end of the listening.</a:t>
             </a:r>
           </a:p>
         </p:txBody>
@@ -12116,7 +11991,7 @@
                 <a:ea typeface="Lexend Deca" pitchFamily="34" charset="-122"/>
                 <a:cs typeface="Lexend Deca" pitchFamily="34" charset="-120"/>
               </a:rPr>
-              <a:t>Audio (about 2:07): coming soon.</a:t>
+              <a:t>Audio: about 1:58. It plays once.</a:t>
             </a:r>
             <a:endParaRPr lang="en-US" sz="2200" dirty="0"/>
           </a:p>
@@ -32107,7 +31982,7 @@
                 <a:ea typeface="Lexend Deca" pitchFamily="34" charset="-122"/>
                 <a:cs typeface="Lexend Deca" pitchFamily="34" charset="-120"/>
               </a:rPr>
-              <a:t>Audio (coming soon): synthetic voices made with Chatterbox TTS (MIT License), cloned from short synthetic reference clips made with Kokoro-82M (Apache License 2.0). No recordings of real people. Each file will carry an inaudible Perth watermark marking it as AI-generated. Font: Lexend Deca (OFL 1.1).</a:t>
+              <a:t>Audio: synthetic voices made with Chatterbox TTS (MIT License), cloned from short synthetic reference clips made with Kokoro-82M (Apache License 2.0). No recordings of real people were used. Each file carries an inaudible Perth watermark marking it as AI-generated. Font: Lexend Deca (OFL 1.1).</a:t>
             </a:r>
             <a:endParaRPr lang="en-US" sz="1350" dirty="0" b="0"/>
           </a:p>

--- a/public/level4/downloads/slides/Level4_Lesson4_Slides.pptx
+++ b/public/level4/downloads/slides/Level4_Lesson4_Slides.pptx
@@ -1056,7 +1056,7 @@
           </a:p>
           <a:p>
             <a:r>
-              <a:t>Reductions: the listening says going to and want to. People often say gonna and wanna. Learners only need to recognize the short forms.</a:t>
+              <a:t>Everyday English: people often say gonna (going to) and wanna (want to). Learners will hear them often. They are fine in casual talk; in writing, at a job interview, or in a formal email, use going to and want to. The listening uses the full forms.</a:t>
             </a:r>
           </a:p>
           <a:p>
@@ -16568,7 +16568,7 @@
                 <a:ea typeface="Lexend Deca" pitchFamily="34" charset="-122"/>
                 <a:cs typeface="Lexend Deca" pitchFamily="34" charset="-120"/>
               </a:rPr>
-              <a:t> and </a:t>
+              <a:t> = going to, </a:t>
             </a:r>
             <a:r>
               <a:rPr lang="en-US" sz="2000" dirty="0" b="1">
@@ -16590,7 +16590,7 @@
                 <a:ea typeface="Lexend Deca" pitchFamily="34" charset="-122"/>
                 <a:cs typeface="Lexend Deca" pitchFamily="34" charset="-120"/>
               </a:rPr>
-              <a:t> are short forms. This listening uses the full forms.</a:t>
+              <a:t> = want to: fine in everyday talk.</a:t>
             </a:r>
             <a:endParaRPr lang="en-US" sz="2000" dirty="0"/>
           </a:p>
